--- a/effect-tests/style-library-v1/samples/style-sample-minimal-premium.pptx
+++ b/effect-tests/style-library-v1/samples/style-sample-minimal-premium.pptx
@@ -902,33 +902,36 @@
           </a:ln>
         </p:spPr>
       </p:sp>
-      <p:pic>
-        <p:nvPicPr>
-          <p:cNvPr id="3" name="Image 0" descr="/Users/dw/Desktop/codex-visual-asset-skills/effect-tests/style-library-v1/assets/background-minimal-premium.png">    </p:cNvPr>
-          <p:cNvPicPr>
-            <a:picLocks noChangeAspect="1"/>
-          </p:cNvPicPr>
-          <p:nvPr/>
-        </p:nvPicPr>
-        <p:blipFill>
-          <a:blip r:embed="rId1"/>
-          <a:stretch>
-            <a:fillRect/>
-          </a:stretch>
-        </p:blipFill>
+      <p:sp>
+        <p:nvSpPr>
+          <p:cNvPr id="3" name="Shape 1"/>
+          <p:cNvSpPr/>
+          <p:nvPr/>
+        </p:nvSpPr>
         <p:spPr>
           <a:xfrm>
             <a:off x="0" y="0"/>
-            <a:ext cx="12191695" cy="6858000"/>
-          </a:xfrm>
-          <a:prstGeom prst="rect">
-            <a:avLst/>
-          </a:prstGeom>
-        </p:spPr>
-      </p:pic>
-      <p:sp>
-        <p:nvSpPr>
-          <p:cNvPr id="4" name="Text 1"/>
+            <a:ext cx="82296" cy="6858000"/>
+          </a:xfrm>
+          <a:prstGeom prst="rect">
+            <a:avLst/>
+          </a:prstGeom>
+          <a:solidFill>
+            <a:srgbClr val="050505"/>
+          </a:solidFill>
+          <a:ln w="12700">
+            <a:solidFill>
+              <a:srgbClr val="050505">
+                <a:alpha val="0"/>
+              </a:srgbClr>
+            </a:solidFill>
+            <a:prstDash val="solid"/>
+          </a:ln>
+        </p:spPr>
+      </p:sp>
+      <p:sp>
+        <p:nvSpPr>
+          <p:cNvPr id="4" name="Text 2"/>
           <p:cNvSpPr/>
           <p:nvPr/>
         </p:nvSpPr>
@@ -969,7 +972,7 @@
       </p:sp>
       <p:sp>
         <p:nvSpPr>
-          <p:cNvPr id="5" name="Text 2"/>
+          <p:cNvPr id="5" name="Text 3"/>
           <p:cNvSpPr/>
           <p:nvPr/>
         </p:nvSpPr>
@@ -1010,7 +1013,7 @@
       </p:sp>
       <p:sp>
         <p:nvSpPr>
-          <p:cNvPr id="6" name="Text 3"/>
+          <p:cNvPr id="6" name="Text 4"/>
           <p:cNvSpPr/>
           <p:nvPr/>
         </p:nvSpPr>
@@ -1051,7 +1054,7 @@
       </p:sp>
       <p:sp>
         <p:nvSpPr>
-          <p:cNvPr id="7" name="Shape 4"/>
+          <p:cNvPr id="7" name="Shape 5"/>
           <p:cNvSpPr/>
           <p:nvPr/>
         </p:nvSpPr>
@@ -1076,7 +1079,7 @@
       </p:sp>
       <p:sp>
         <p:nvSpPr>
-          <p:cNvPr id="8" name="Shape 5"/>
+          <p:cNvPr id="8" name="Shape 6"/>
           <p:cNvSpPr/>
           <p:nvPr/>
         </p:nvSpPr>
@@ -1101,7 +1104,7 @@
       </p:sp>
       <p:sp>
         <p:nvSpPr>
-          <p:cNvPr id="9" name="Text 6"/>
+          <p:cNvPr id="9" name="Text 7"/>
           <p:cNvSpPr/>
           <p:nvPr/>
         </p:nvSpPr>
@@ -1142,7 +1145,7 @@
       </p:sp>
       <p:sp>
         <p:nvSpPr>
-          <p:cNvPr id="10" name="Text 7"/>
+          <p:cNvPr id="10" name="Text 8"/>
           <p:cNvSpPr/>
           <p:nvPr/>
         </p:nvSpPr>
@@ -1183,7 +1186,7 @@
       </p:sp>
       <p:sp>
         <p:nvSpPr>
-          <p:cNvPr id="11" name="Shape 8"/>
+          <p:cNvPr id="11" name="Shape 9"/>
           <p:cNvSpPr/>
           <p:nvPr/>
         </p:nvSpPr>
@@ -1210,7 +1213,7 @@
       </p:sp>
       <p:sp>
         <p:nvSpPr>
-          <p:cNvPr id="12" name="Text 9"/>
+          <p:cNvPr id="12" name="Text 10"/>
           <p:cNvSpPr/>
           <p:nvPr/>
         </p:nvSpPr>
@@ -1251,7 +1254,7 @@
       </p:sp>
       <p:sp>
         <p:nvSpPr>
-          <p:cNvPr id="13" name="Shape 10"/>
+          <p:cNvPr id="13" name="Shape 11"/>
           <p:cNvSpPr/>
           <p:nvPr/>
         </p:nvSpPr>
@@ -1278,7 +1281,7 @@
       </p:sp>
       <p:sp>
         <p:nvSpPr>
-          <p:cNvPr id="14" name="Text 11"/>
+          <p:cNvPr id="14" name="Text 12"/>
           <p:cNvSpPr/>
           <p:nvPr/>
         </p:nvSpPr>
@@ -1319,7 +1322,7 @@
       </p:sp>
       <p:sp>
         <p:nvSpPr>
-          <p:cNvPr id="15" name="Shape 12"/>
+          <p:cNvPr id="15" name="Shape 13"/>
           <p:cNvSpPr/>
           <p:nvPr/>
         </p:nvSpPr>
@@ -1346,7 +1349,7 @@
       </p:sp>
       <p:sp>
         <p:nvSpPr>
-          <p:cNvPr id="16" name="Text 13"/>
+          <p:cNvPr id="16" name="Text 14"/>
           <p:cNvSpPr/>
           <p:nvPr/>
         </p:nvSpPr>
@@ -1387,7 +1390,7 @@
       </p:sp>
       <p:sp>
         <p:nvSpPr>
-          <p:cNvPr id="17" name="Shape 14"/>
+          <p:cNvPr id="17" name="Shape 15"/>
           <p:cNvSpPr/>
           <p:nvPr/>
         </p:nvSpPr>
@@ -1412,7 +1415,7 @@
       </p:sp>
       <p:sp>
         <p:nvSpPr>
-          <p:cNvPr id="18" name="Text 15"/>
+          <p:cNvPr id="18" name="Text 16"/>
           <p:cNvSpPr/>
           <p:nvPr/>
         </p:nvSpPr>
@@ -1453,7 +1456,7 @@
       </p:sp>
       <p:sp>
         <p:nvSpPr>
-          <p:cNvPr id="19" name="Text 16"/>
+          <p:cNvPr id="19" name="Text 17"/>
           <p:cNvSpPr/>
           <p:nvPr/>
         </p:nvSpPr>
@@ -1494,7 +1497,7 @@
       </p:sp>
       <p:sp>
         <p:nvSpPr>
-          <p:cNvPr id="20" name="Shape 17"/>
+          <p:cNvPr id="20" name="Shape 18"/>
           <p:cNvSpPr/>
           <p:nvPr/>
         </p:nvSpPr>
@@ -1519,7 +1522,7 @@
       </p:sp>
       <p:sp>
         <p:nvSpPr>
-          <p:cNvPr id="21" name="Text 18"/>
+          <p:cNvPr id="21" name="Text 19"/>
           <p:cNvSpPr/>
           <p:nvPr/>
         </p:nvSpPr>
@@ -1560,7 +1563,7 @@
       </p:sp>
       <p:sp>
         <p:nvSpPr>
-          <p:cNvPr id="22" name="Text 19"/>
+          <p:cNvPr id="22" name="Text 20"/>
           <p:cNvSpPr/>
           <p:nvPr/>
         </p:nvSpPr>
@@ -1601,7 +1604,7 @@
       </p:sp>
       <p:sp>
         <p:nvSpPr>
-          <p:cNvPr id="23" name="Shape 20"/>
+          <p:cNvPr id="23" name="Shape 21"/>
           <p:cNvSpPr/>
           <p:nvPr/>
         </p:nvSpPr>
@@ -1626,7 +1629,7 @@
       </p:sp>
       <p:sp>
         <p:nvSpPr>
-          <p:cNvPr id="24" name="Text 21"/>
+          <p:cNvPr id="24" name="Text 22"/>
           <p:cNvSpPr/>
           <p:nvPr/>
         </p:nvSpPr>
@@ -1667,7 +1670,7 @@
       </p:sp>
       <p:sp>
         <p:nvSpPr>
-          <p:cNvPr id="25" name="Text 22"/>
+          <p:cNvPr id="25" name="Text 23"/>
           <p:cNvSpPr/>
           <p:nvPr/>
         </p:nvSpPr>
@@ -1708,7 +1711,7 @@
       </p:sp>
       <p:sp>
         <p:nvSpPr>
-          <p:cNvPr id="26" name="Text 23"/>
+          <p:cNvPr id="26" name="Text 24"/>
           <p:cNvSpPr/>
           <p:nvPr/>
         </p:nvSpPr>
@@ -1749,7 +1752,7 @@
       </p:sp>
       <p:sp>
         <p:nvSpPr>
-          <p:cNvPr id="27" name="Shape 24"/>
+          <p:cNvPr id="27" name="Shape 25"/>
           <p:cNvSpPr/>
           <p:nvPr/>
         </p:nvSpPr>
@@ -1774,7 +1777,7 @@
       </p:sp>
       <p:sp>
         <p:nvSpPr>
-          <p:cNvPr id="28" name="Shape 25"/>
+          <p:cNvPr id="28" name="Shape 26"/>
           <p:cNvSpPr/>
           <p:nvPr/>
         </p:nvSpPr>
@@ -1799,7 +1802,7 @@
       </p:sp>
       <p:sp>
         <p:nvSpPr>
-          <p:cNvPr id="29" name="Shape 26"/>
+          <p:cNvPr id="29" name="Shape 27"/>
           <p:cNvSpPr/>
           <p:nvPr/>
         </p:nvSpPr>
@@ -1826,7 +1829,7 @@
       </p:sp>
       <p:sp>
         <p:nvSpPr>
-          <p:cNvPr id="30" name="Text 27"/>
+          <p:cNvPr id="30" name="Text 28"/>
           <p:cNvSpPr/>
           <p:nvPr/>
         </p:nvSpPr>
@@ -1867,7 +1870,7 @@
       </p:sp>
       <p:sp>
         <p:nvSpPr>
-          <p:cNvPr id="31" name="Shape 28"/>
+          <p:cNvPr id="31" name="Shape 29"/>
           <p:cNvSpPr/>
           <p:nvPr/>
         </p:nvSpPr>
@@ -1894,7 +1897,7 @@
       </p:sp>
       <p:sp>
         <p:nvSpPr>
-          <p:cNvPr id="32" name="Text 29"/>
+          <p:cNvPr id="32" name="Text 30"/>
           <p:cNvSpPr/>
           <p:nvPr/>
         </p:nvSpPr>
@@ -1935,7 +1938,7 @@
       </p:sp>
       <p:sp>
         <p:nvSpPr>
-          <p:cNvPr id="33" name="Shape 30"/>
+          <p:cNvPr id="33" name="Shape 31"/>
           <p:cNvSpPr/>
           <p:nvPr/>
         </p:nvSpPr>
@@ -1962,7 +1965,7 @@
       </p:sp>
       <p:sp>
         <p:nvSpPr>
-          <p:cNvPr id="34" name="Text 31"/>
+          <p:cNvPr id="34" name="Text 32"/>
           <p:cNvSpPr/>
           <p:nvPr/>
         </p:nvSpPr>
@@ -2003,7 +2006,7 @@
       </p:sp>
       <p:sp>
         <p:nvSpPr>
-          <p:cNvPr id="35" name="Shape 32"/>
+          <p:cNvPr id="35" name="Shape 33"/>
           <p:cNvSpPr/>
           <p:nvPr/>
         </p:nvSpPr>
@@ -2030,7 +2033,7 @@
       </p:sp>
       <p:sp>
         <p:nvSpPr>
-          <p:cNvPr id="36" name="Text 33"/>
+          <p:cNvPr id="36" name="Text 34"/>
           <p:cNvSpPr/>
           <p:nvPr/>
         </p:nvSpPr>

--- a/effect-tests/style-library-v1/samples/style-sample-minimal-premium.pptx
+++ b/effect-tests/style-library-v1/samples/style-sample-minimal-premium.pptx
@@ -902,26 +902,52 @@
           </a:ln>
         </p:spPr>
       </p:sp>
-      <p:sp>
-        <p:nvSpPr>
-          <p:cNvPr id="3" name="Shape 1"/>
-          <p:cNvSpPr/>
-          <p:nvPr/>
-        </p:nvSpPr>
+      <p:pic>
+        <p:nvPicPr>
+          <p:cNvPr id="3" name="Image 0" descr="/Users/dw/Desktop/codex-visual-ppt-deck-builder/effect-tests/style-library-v1/assets/background-minimal-premium.png">    </p:cNvPr>
+          <p:cNvPicPr>
+            <a:picLocks noChangeAspect="1"/>
+          </p:cNvPicPr>
+          <p:nvPr/>
+        </p:nvPicPr>
+        <p:blipFill>
+          <a:blip r:embed="rId1"/>
+          <a:stretch>
+            <a:fillRect/>
+          </a:stretch>
+        </p:blipFill>
         <p:spPr>
           <a:xfrm>
             <a:off x="0" y="0"/>
-            <a:ext cx="82296" cy="6858000"/>
-          </a:xfrm>
-          <a:prstGeom prst="rect">
-            <a:avLst/>
-          </a:prstGeom>
-          <a:solidFill>
-            <a:srgbClr val="050505"/>
+            <a:ext cx="12191695" cy="6858000"/>
+          </a:xfrm>
+          <a:prstGeom prst="rect">
+            <a:avLst/>
+          </a:prstGeom>
+        </p:spPr>
+      </p:pic>
+      <p:sp>
+        <p:nvSpPr>
+          <p:cNvPr id="4" name="Shape 1"/>
+          <p:cNvSpPr/>
+          <p:nvPr/>
+        </p:nvSpPr>
+        <p:spPr>
+          <a:xfrm>
+            <a:off x="0" y="0"/>
+            <a:ext cx="12191695" cy="6858000"/>
+          </a:xfrm>
+          <a:prstGeom prst="rect">
+            <a:avLst/>
+          </a:prstGeom>
+          <a:solidFill>
+            <a:srgbClr val="FFFFFF">
+              <a:alpha val="82000"/>
+            </a:srgbClr>
           </a:solidFill>
           <a:ln w="12700">
             <a:solidFill>
-              <a:srgbClr val="050505">
+              <a:srgbClr val="333333">
                 <a:alpha val="0"/>
               </a:srgbClr>
             </a:solidFill>
@@ -931,14 +957,39 @@
       </p:sp>
       <p:sp>
         <p:nvSpPr>
-          <p:cNvPr id="4" name="Text 2"/>
+          <p:cNvPr id="5" name="Shape 2"/>
+          <p:cNvSpPr/>
+          <p:nvPr/>
+        </p:nvSpPr>
+        <p:spPr>
+          <a:xfrm>
+            <a:off x="6236208" y="1115568"/>
+            <a:ext cx="0" cy="4498848"/>
+          </a:xfrm>
+          <a:prstGeom prst="line">
+            <a:avLst/>
+          </a:prstGeom>
+          <a:noFill/>
+          <a:ln w="12700">
+            <a:solidFill>
+              <a:srgbClr val="A7A7A7">
+                <a:alpha val="55000"/>
+              </a:srgbClr>
+            </a:solidFill>
+            <a:prstDash val="solid"/>
+          </a:ln>
+        </p:spPr>
+      </p:sp>
+      <p:sp>
+        <p:nvSpPr>
+          <p:cNvPr id="6" name="Text 3"/>
           <p:cNvSpPr/>
           <p:nvPr/>
         </p:nvSpPr>
         <p:spPr>
           <a:xfrm>
             <a:off x="658368" y="384048"/>
-            <a:ext cx="2011680" cy="164592"/>
+            <a:ext cx="2468880" cy="164592"/>
           </a:xfrm>
           <a:prstGeom prst="rect">
             <a:avLst/>
@@ -960,11 +1011,11 @@
                 <a:solidFill>
                   <a:srgbClr val="050505"/>
                 </a:solidFill>
-                <a:latin typeface="PingFang SC" pitchFamily="34" charset="0"/>
-                <a:ea typeface="PingFang SC" pitchFamily="34" charset="-122"/>
-                <a:cs typeface="PingFang SC" pitchFamily="34" charset="-120"/>
+                <a:latin typeface="Avenir Next" pitchFamily="34" charset="0"/>
+                <a:ea typeface="Avenir Next" pitchFamily="34" charset="-122"/>
+                <a:cs typeface="Avenir Next" pitchFamily="34" charset="-120"/>
               </a:rPr>
-              <a:t>2026 RESEARCH</a:t>
+              <a:t>BOARD BRIEF</a:t>
             </a:r>
             <a:endParaRPr lang="en-US" sz="750" dirty="0"/>
           </a:p>
@@ -972,14 +1023,14 @@
       </p:sp>
       <p:sp>
         <p:nvSpPr>
-          <p:cNvPr id="5" name="Text 3"/>
+          <p:cNvPr id="7" name="Text 4"/>
           <p:cNvSpPr/>
           <p:nvPr/>
         </p:nvSpPr>
         <p:spPr>
           <a:xfrm>
             <a:off x="658368" y="658368"/>
-            <a:ext cx="5394960" cy="777240"/>
+            <a:ext cx="5394960" cy="822960"/>
           </a:xfrm>
           <a:prstGeom prst="rect">
             <a:avLst/>
@@ -1013,14 +1064,14 @@
       </p:sp>
       <p:sp>
         <p:nvSpPr>
-          <p:cNvPr id="6" name="Text 4"/>
+          <p:cNvPr id="8" name="Text 5"/>
           <p:cNvSpPr/>
           <p:nvPr/>
         </p:nvSpPr>
         <p:spPr>
           <a:xfrm>
             <a:off x="694944" y="1426464"/>
-            <a:ext cx="4114800" cy="228600"/>
+            <a:ext cx="4389120" cy="219456"/>
           </a:xfrm>
           <a:prstGeom prst="rect">
             <a:avLst/>
@@ -1054,7 +1105,7 @@
       </p:sp>
       <p:sp>
         <p:nvSpPr>
-          <p:cNvPr id="7" name="Shape 5"/>
+          <p:cNvPr id="9" name="Shape 6"/>
           <p:cNvSpPr/>
           <p:nvPr/>
         </p:nvSpPr>
@@ -1079,39 +1130,14 @@
       </p:sp>
       <p:sp>
         <p:nvSpPr>
-          <p:cNvPr id="8" name="Shape 6"/>
-          <p:cNvSpPr/>
-          <p:nvPr/>
-        </p:nvSpPr>
-        <p:spPr>
-          <a:xfrm>
-            <a:off x="6236208" y="1115568"/>
-            <a:ext cx="0" cy="4498848"/>
-          </a:xfrm>
-          <a:prstGeom prst="line">
-            <a:avLst/>
-          </a:prstGeom>
-          <a:noFill/>
-          <a:ln w="12700">
-            <a:solidFill>
-              <a:srgbClr val="A7A7A7">
-                <a:alpha val="55000"/>
-              </a:srgbClr>
-            </a:solidFill>
-            <a:prstDash val="solid"/>
-          </a:ln>
-        </p:spPr>
-      </p:sp>
-      <p:sp>
-        <p:nvSpPr>
-          <p:cNvPr id="9" name="Text 7"/>
+          <p:cNvPr id="10" name="Text 7"/>
           <p:cNvSpPr/>
           <p:nvPr/>
         </p:nvSpPr>
         <p:spPr>
           <a:xfrm>
             <a:off x="749808" y="2103120"/>
-            <a:ext cx="1645920" cy="256032"/>
+            <a:ext cx="2011680" cy="256032"/>
           </a:xfrm>
           <a:prstGeom prst="rect">
             <a:avLst/>
@@ -1145,14 +1171,14 @@
       </p:sp>
       <p:sp>
         <p:nvSpPr>
-          <p:cNvPr id="10" name="Text 8"/>
+          <p:cNvPr id="11" name="Text 8"/>
           <p:cNvSpPr/>
           <p:nvPr/>
         </p:nvSpPr>
         <p:spPr>
           <a:xfrm>
             <a:off x="749808" y="2606040"/>
-            <a:ext cx="4526280" cy="603504"/>
+            <a:ext cx="4526280" cy="640080"/>
           </a:xfrm>
           <a:prstGeom prst="rect">
             <a:avLst/>
@@ -1186,7 +1212,7 @@
       </p:sp>
       <p:sp>
         <p:nvSpPr>
-          <p:cNvPr id="11" name="Shape 9"/>
+          <p:cNvPr id="12" name="Shape 9"/>
           <p:cNvSpPr/>
           <p:nvPr/>
         </p:nvSpPr>
@@ -1213,7 +1239,7 @@
       </p:sp>
       <p:sp>
         <p:nvSpPr>
-          <p:cNvPr id="12" name="Text 10"/>
+          <p:cNvPr id="13" name="Text 10"/>
           <p:cNvSpPr/>
           <p:nvPr/>
         </p:nvSpPr>
@@ -1254,7 +1280,7 @@
       </p:sp>
       <p:sp>
         <p:nvSpPr>
-          <p:cNvPr id="13" name="Shape 11"/>
+          <p:cNvPr id="14" name="Shape 11"/>
           <p:cNvSpPr/>
           <p:nvPr/>
         </p:nvSpPr>
@@ -1281,7 +1307,7 @@
       </p:sp>
       <p:sp>
         <p:nvSpPr>
-          <p:cNvPr id="14" name="Text 12"/>
+          <p:cNvPr id="15" name="Text 12"/>
           <p:cNvSpPr/>
           <p:nvPr/>
         </p:nvSpPr>
@@ -1322,7 +1348,7 @@
       </p:sp>
       <p:sp>
         <p:nvSpPr>
-          <p:cNvPr id="15" name="Shape 13"/>
+          <p:cNvPr id="16" name="Shape 13"/>
           <p:cNvSpPr/>
           <p:nvPr/>
         </p:nvSpPr>
@@ -1349,7 +1375,7 @@
       </p:sp>
       <p:sp>
         <p:nvSpPr>
-          <p:cNvPr id="16" name="Text 14"/>
+          <p:cNvPr id="17" name="Text 14"/>
           <p:cNvSpPr/>
           <p:nvPr/>
         </p:nvSpPr>
@@ -1390,7 +1416,7 @@
       </p:sp>
       <p:sp>
         <p:nvSpPr>
-          <p:cNvPr id="17" name="Shape 15"/>
+          <p:cNvPr id="18" name="Shape 15"/>
           <p:cNvSpPr/>
           <p:nvPr/>
         </p:nvSpPr>
@@ -1415,14 +1441,14 @@
       </p:sp>
       <p:sp>
         <p:nvSpPr>
-          <p:cNvPr id="18" name="Text 16"/>
+          <p:cNvPr id="19" name="Text 16"/>
           <p:cNvSpPr/>
           <p:nvPr/>
         </p:nvSpPr>
         <p:spPr>
           <a:xfrm>
             <a:off x="749808" y="5084064"/>
-            <a:ext cx="1511808" cy="329184"/>
+            <a:ext cx="1530096" cy="329184"/>
           </a:xfrm>
           <a:prstGeom prst="rect">
             <a:avLst/>
@@ -1456,14 +1482,14 @@
       </p:sp>
       <p:sp>
         <p:nvSpPr>
-          <p:cNvPr id="19" name="Text 17"/>
+          <p:cNvPr id="20" name="Text 17"/>
           <p:cNvSpPr/>
           <p:nvPr/>
         </p:nvSpPr>
         <p:spPr>
           <a:xfrm>
             <a:off x="749808" y="5449824"/>
-            <a:ext cx="1511808" cy="228600"/>
+            <a:ext cx="1530096" cy="228600"/>
           </a:xfrm>
           <a:prstGeom prst="rect">
             <a:avLst/>
@@ -1497,7 +1523,7 @@
       </p:sp>
       <p:sp>
         <p:nvSpPr>
-          <p:cNvPr id="20" name="Shape 18"/>
+          <p:cNvPr id="21" name="Shape 18"/>
           <p:cNvSpPr/>
           <p:nvPr/>
         </p:nvSpPr>
@@ -1522,14 +1548,14 @@
       </p:sp>
       <p:sp>
         <p:nvSpPr>
-          <p:cNvPr id="21" name="Text 19"/>
+          <p:cNvPr id="22" name="Text 19"/>
           <p:cNvSpPr/>
           <p:nvPr/>
         </p:nvSpPr>
         <p:spPr>
           <a:xfrm>
             <a:off x="2426208" y="5084064"/>
-            <a:ext cx="1511808" cy="329184"/>
+            <a:ext cx="1530096" cy="329184"/>
           </a:xfrm>
           <a:prstGeom prst="rect">
             <a:avLst/>
@@ -1563,14 +1589,14 @@
       </p:sp>
       <p:sp>
         <p:nvSpPr>
-          <p:cNvPr id="22" name="Text 20"/>
+          <p:cNvPr id="23" name="Text 20"/>
           <p:cNvSpPr/>
           <p:nvPr/>
         </p:nvSpPr>
         <p:spPr>
           <a:xfrm>
             <a:off x="2426208" y="5449824"/>
-            <a:ext cx="1511808" cy="228600"/>
+            <a:ext cx="1530096" cy="228600"/>
           </a:xfrm>
           <a:prstGeom prst="rect">
             <a:avLst/>
@@ -1604,7 +1630,7 @@
       </p:sp>
       <p:sp>
         <p:nvSpPr>
-          <p:cNvPr id="23" name="Shape 21"/>
+          <p:cNvPr id="24" name="Shape 21"/>
           <p:cNvSpPr/>
           <p:nvPr/>
         </p:nvSpPr>
@@ -1629,14 +1655,14 @@
       </p:sp>
       <p:sp>
         <p:nvSpPr>
-          <p:cNvPr id="24" name="Text 22"/>
+          <p:cNvPr id="25" name="Text 22"/>
           <p:cNvSpPr/>
           <p:nvPr/>
         </p:nvSpPr>
         <p:spPr>
           <a:xfrm>
             <a:off x="4102608" y="5084064"/>
-            <a:ext cx="1511808" cy="329184"/>
+            <a:ext cx="1530096" cy="329184"/>
           </a:xfrm>
           <a:prstGeom prst="rect">
             <a:avLst/>
@@ -1670,14 +1696,14 @@
       </p:sp>
       <p:sp>
         <p:nvSpPr>
-          <p:cNvPr id="25" name="Text 23"/>
+          <p:cNvPr id="26" name="Text 23"/>
           <p:cNvSpPr/>
           <p:nvPr/>
         </p:nvSpPr>
         <p:spPr>
           <a:xfrm>
             <a:off x="4102608" y="5449824"/>
-            <a:ext cx="1511808" cy="228600"/>
+            <a:ext cx="1530096" cy="228600"/>
           </a:xfrm>
           <a:prstGeom prst="rect">
             <a:avLst/>
@@ -1711,14 +1737,14 @@
       </p:sp>
       <p:sp>
         <p:nvSpPr>
-          <p:cNvPr id="26" name="Text 24"/>
+          <p:cNvPr id="27" name="Text 24"/>
           <p:cNvSpPr/>
           <p:nvPr/>
         </p:nvSpPr>
         <p:spPr>
           <a:xfrm>
             <a:off x="6611112" y="1444752"/>
-            <a:ext cx="2011680" cy="237744"/>
+            <a:ext cx="2377440" cy="237744"/>
           </a:xfrm>
           <a:prstGeom prst="rect">
             <a:avLst/>
@@ -1744,7 +1770,7 @@
                 <a:ea typeface="PingFang SC" pitchFamily="34" charset="-122"/>
                 <a:cs typeface="PingFang SC" pitchFamily="34" charset="-120"/>
               </a:rPr>
-              <a:t>趋势指数</a:t>
+              <a:t>决策迁移</a:t>
             </a:r>
             <a:endParaRPr lang="en-US" sz="1250" dirty="0"/>
           </a:p>
@@ -1752,14 +1778,14 @@
       </p:sp>
       <p:sp>
         <p:nvSpPr>
-          <p:cNvPr id="27" name="Shape 25"/>
-          <p:cNvSpPr/>
-          <p:nvPr/>
-        </p:nvSpPr>
-        <p:spPr>
-          <a:xfrm>
-            <a:off x="6611112" y="1828800"/>
-            <a:ext cx="3977640" cy="0"/>
+          <p:cNvPr id="28" name="Shape 25"/>
+          <p:cNvSpPr/>
+          <p:nvPr/>
+        </p:nvSpPr>
+        <p:spPr>
+          <a:xfrm>
+            <a:off x="6537960" y="1993392"/>
+            <a:ext cx="4069080" cy="0"/>
           </a:xfrm>
           <a:prstGeom prst="line">
             <a:avLst/>
@@ -1777,14 +1803,14 @@
       </p:sp>
       <p:sp>
         <p:nvSpPr>
-          <p:cNvPr id="28" name="Shape 26"/>
+          <p:cNvPr id="29" name="Shape 26"/>
           <p:cNvSpPr/>
           <p:nvPr/>
         </p:nvSpPr>
         <p:spPr>
           <a:xfrm>
             <a:off x="6537960" y="4791456"/>
-            <a:ext cx="3977640" cy="0"/>
+            <a:ext cx="4069080" cy="0"/>
           </a:xfrm>
           <a:prstGeom prst="line">
             <a:avLst/>
@@ -1802,14 +1828,14 @@
       </p:sp>
       <p:sp>
         <p:nvSpPr>
-          <p:cNvPr id="29" name="Shape 27"/>
+          <p:cNvPr id="30" name="Shape 27"/>
           <p:cNvSpPr/>
           <p:nvPr/>
         </p:nvSpPr>
         <p:spPr>
           <a:xfrm>
             <a:off x="6739128" y="3700760"/>
-            <a:ext cx="742950" cy="1090696"/>
+            <a:ext cx="765810" cy="1090696"/>
           </a:xfrm>
           <a:prstGeom prst="rect">
             <a:avLst/>
@@ -1829,14 +1855,14 @@
       </p:sp>
       <p:sp>
         <p:nvSpPr>
-          <p:cNvPr id="30" name="Text 28"/>
+          <p:cNvPr id="31" name="Text 28"/>
           <p:cNvSpPr/>
           <p:nvPr/>
         </p:nvSpPr>
         <p:spPr>
           <a:xfrm>
             <a:off x="6702552" y="4919472"/>
-            <a:ext cx="816102" cy="164592"/>
+            <a:ext cx="838962" cy="164592"/>
           </a:xfrm>
           <a:prstGeom prst="rect">
             <a:avLst/>
@@ -1870,24 +1896,24 @@
       </p:sp>
       <p:sp>
         <p:nvSpPr>
-          <p:cNvPr id="31" name="Shape 29"/>
-          <p:cNvSpPr/>
-          <p:nvPr/>
-        </p:nvSpPr>
-        <p:spPr>
-          <a:xfrm>
-            <a:off x="7683246" y="3129443"/>
-            <a:ext cx="742950" cy="1662013"/>
-          </a:xfrm>
-          <a:prstGeom prst="rect">
-            <a:avLst/>
-          </a:prstGeom>
-          <a:solidFill>
-            <a:srgbClr val="4A4A4A"/>
+          <p:cNvPr id="32" name="Shape 29"/>
+          <p:cNvSpPr/>
+          <p:nvPr/>
+        </p:nvSpPr>
+        <p:spPr>
+          <a:xfrm>
+            <a:off x="7706106" y="3129443"/>
+            <a:ext cx="765810" cy="1662013"/>
+          </a:xfrm>
+          <a:prstGeom prst="rect">
+            <a:avLst/>
+          </a:prstGeom>
+          <a:solidFill>
+            <a:srgbClr val="5D6673"/>
           </a:solidFill>
           <a:ln w="12700">
             <a:solidFill>
-              <a:srgbClr val="4A4A4A">
+              <a:srgbClr val="5D6673">
                 <a:alpha val="0"/>
               </a:srgbClr>
             </a:solidFill>
@@ -1897,14 +1923,14 @@
       </p:sp>
       <p:sp>
         <p:nvSpPr>
-          <p:cNvPr id="32" name="Text 30"/>
-          <p:cNvSpPr/>
-          <p:nvPr/>
-        </p:nvSpPr>
-        <p:spPr>
-          <a:xfrm>
-            <a:off x="7646670" y="4919472"/>
-            <a:ext cx="816102" cy="164592"/>
+          <p:cNvPr id="33" name="Text 30"/>
+          <p:cNvSpPr/>
+          <p:nvPr/>
+        </p:nvSpPr>
+        <p:spPr>
+          <a:xfrm>
+            <a:off x="7669530" y="4919472"/>
+            <a:ext cx="838962" cy="164592"/>
           </a:xfrm>
           <a:prstGeom prst="rect">
             <a:avLst/>
@@ -1938,14 +1964,14 @@
       </p:sp>
       <p:sp>
         <p:nvSpPr>
-          <p:cNvPr id="33" name="Shape 31"/>
-          <p:cNvSpPr/>
-          <p:nvPr/>
-        </p:nvSpPr>
-        <p:spPr>
-          <a:xfrm>
-            <a:off x="8627364" y="2765877"/>
-            <a:ext cx="742950" cy="2025579"/>
+          <p:cNvPr id="34" name="Shape 31"/>
+          <p:cNvSpPr/>
+          <p:nvPr/>
+        </p:nvSpPr>
+        <p:spPr>
+          <a:xfrm>
+            <a:off x="8673084" y="2765877"/>
+            <a:ext cx="765810" cy="2025579"/>
           </a:xfrm>
           <a:prstGeom prst="rect">
             <a:avLst/>
@@ -1965,14 +1991,14 @@
       </p:sp>
       <p:sp>
         <p:nvSpPr>
-          <p:cNvPr id="34" name="Text 32"/>
-          <p:cNvSpPr/>
-          <p:nvPr/>
-        </p:nvSpPr>
-        <p:spPr>
-          <a:xfrm>
-            <a:off x="8590788" y="4919472"/>
-            <a:ext cx="816102" cy="164592"/>
+          <p:cNvPr id="35" name="Text 32"/>
+          <p:cNvSpPr/>
+          <p:nvPr/>
+        </p:nvSpPr>
+        <p:spPr>
+          <a:xfrm>
+            <a:off x="8636508" y="4919472"/>
+            <a:ext cx="838962" cy="164592"/>
           </a:xfrm>
           <a:prstGeom prst="rect">
             <a:avLst/>
@@ -2006,24 +2032,24 @@
       </p:sp>
       <p:sp>
         <p:nvSpPr>
-          <p:cNvPr id="35" name="Shape 33"/>
-          <p:cNvSpPr/>
-          <p:nvPr/>
-        </p:nvSpPr>
-        <p:spPr>
-          <a:xfrm>
-            <a:off x="9571482" y="2428281"/>
-            <a:ext cx="742950" cy="2363175"/>
-          </a:xfrm>
-          <a:prstGeom prst="rect">
-            <a:avLst/>
-          </a:prstGeom>
-          <a:solidFill>
-            <a:srgbClr val="4A4A4A"/>
+          <p:cNvPr id="36" name="Shape 33"/>
+          <p:cNvSpPr/>
+          <p:nvPr/>
+        </p:nvSpPr>
+        <p:spPr>
+          <a:xfrm>
+            <a:off x="9640062" y="2428281"/>
+            <a:ext cx="765810" cy="2363175"/>
+          </a:xfrm>
+          <a:prstGeom prst="rect">
+            <a:avLst/>
+          </a:prstGeom>
+          <a:solidFill>
+            <a:srgbClr val="5D6673"/>
           </a:solidFill>
           <a:ln w="12700">
             <a:solidFill>
-              <a:srgbClr val="4A4A4A">
+              <a:srgbClr val="5D6673">
                 <a:alpha val="0"/>
               </a:srgbClr>
             </a:solidFill>
@@ -2033,14 +2059,14 @@
       </p:sp>
       <p:sp>
         <p:nvSpPr>
-          <p:cNvPr id="36" name="Text 34"/>
-          <p:cNvSpPr/>
-          <p:nvPr/>
-        </p:nvSpPr>
-        <p:spPr>
-          <a:xfrm>
-            <a:off x="9534906" y="4919472"/>
-            <a:ext cx="816102" cy="164592"/>
+          <p:cNvPr id="37" name="Text 34"/>
+          <p:cNvSpPr/>
+          <p:nvPr/>
+        </p:nvSpPr>
+        <p:spPr>
+          <a:xfrm>
+            <a:off x="9603486" y="4919472"/>
+            <a:ext cx="838962" cy="164592"/>
           </a:xfrm>
           <a:prstGeom prst="rect">
             <a:avLst/>
@@ -2069,6 +2095,113 @@
               <a:t>组织</a:t>
             </a:r>
             <a:endParaRPr lang="en-US" sz="680" dirty="0"/>
+          </a:p>
+        </p:txBody>
+      </p:sp>
+      <p:sp>
+        <p:nvSpPr>
+          <p:cNvPr id="38" name="Shape 35"/>
+          <p:cNvSpPr/>
+          <p:nvPr/>
+        </p:nvSpPr>
+        <p:spPr>
+          <a:xfrm>
+            <a:off x="749808" y="6254496"/>
+            <a:ext cx="475488" cy="0"/>
+          </a:xfrm>
+          <a:prstGeom prst="line">
+            <a:avLst/>
+          </a:prstGeom>
+          <a:noFill/>
+          <a:ln w="19050">
+            <a:solidFill>
+              <a:srgbClr val="050505">
+                <a:alpha val="90000"/>
+              </a:srgbClr>
+            </a:solidFill>
+            <a:prstDash val="solid"/>
+          </a:ln>
+        </p:spPr>
+      </p:sp>
+      <p:sp>
+        <p:nvSpPr>
+          <p:cNvPr id="39" name="Text 36"/>
+          <p:cNvSpPr/>
+          <p:nvPr/>
+        </p:nvSpPr>
+        <p:spPr>
+          <a:xfrm>
+            <a:off x="1371600" y="6163056"/>
+            <a:ext cx="5669280" cy="164592"/>
+          </a:xfrm>
+          <a:prstGeom prst="rect">
+            <a:avLst/>
+          </a:prstGeom>
+          <a:noFill/>
+          <a:ln/>
+        </p:spPr>
+        <p:txBody>
+          <a:bodyPr wrap="square" lIns="0" tIns="0" rIns="0" bIns="0" rtlCol="0" anchor="ctr">
+            <a:normAutofit/>
+          </a:bodyPr>
+          <a:lstStyle/>
+          <a:p>
+            <a:pPr algn="l" indent="0" marL="0">
+              <a:buNone/>
+            </a:pPr>
+            <a:r>
+              <a:rPr lang="en-US" sz="740" dirty="0">
+                <a:solidFill>
+                  <a:srgbClr val="5D6673"/>
+                </a:solidFill>
+                <a:latin typeface="PingFang SC" pitchFamily="34" charset="0"/>
+                <a:ea typeface="PingFang SC" pitchFamily="34" charset="-122"/>
+                <a:cs typeface="PingFang SC" pitchFamily="34" charset="-120"/>
+              </a:rPr>
+              <a:t>文字、数字和图表标签均为 PPT 可编辑对象</a:t>
+            </a:r>
+            <a:endParaRPr lang="en-US" sz="740" dirty="0"/>
+          </a:p>
+        </p:txBody>
+      </p:sp>
+      <p:sp>
+        <p:nvSpPr>
+          <p:cNvPr id="40" name="Text 37"/>
+          <p:cNvSpPr/>
+          <p:nvPr/>
+        </p:nvSpPr>
+        <p:spPr>
+          <a:xfrm>
+            <a:off x="9875520" y="6291072"/>
+            <a:ext cx="914400" cy="146304"/>
+          </a:xfrm>
+          <a:prstGeom prst="rect">
+            <a:avLst/>
+          </a:prstGeom>
+          <a:noFill/>
+          <a:ln/>
+        </p:spPr>
+        <p:txBody>
+          <a:bodyPr wrap="square" lIns="0" tIns="0" rIns="0" bIns="0" rtlCol="0" anchor="ctr">
+            <a:normAutofit/>
+          </a:bodyPr>
+          <a:lstStyle/>
+          <a:p>
+            <a:pPr algn="r" indent="0" marL="0">
+              <a:buNone/>
+            </a:pPr>
+            <a:r>
+              <a:rPr lang="en-US" sz="720" b="1" dirty="0">
+                <a:solidFill>
+                  <a:srgbClr val="050505"/>
+                </a:solidFill>
+                <a:latin typeface="Avenir Next" pitchFamily="34" charset="0"/>
+                <a:ea typeface="Avenir Next" pitchFamily="34" charset="-122"/>
+                <a:cs typeface="Avenir Next" pitchFamily="34" charset="-120"/>
+              </a:rPr>
+              <a:t>简约高级</a:t>
+            </a:r>
+            <a:endParaRPr lang="en-US" sz="720" dirty="0"/>
           </a:p>
         </p:txBody>
       </p:sp>
